--- a/presentacion/Del_Acero_al_Algoritmo_FINAL_MORPH.pptx
+++ b/presentacion/Del_Acero_al_Algoritmo_FINAL_MORPH.pptx
@@ -25776,7 +25776,7 @@
                 </a:solidFill>
                 <a:latin typeface="Aptos"/>
               </a:rPr>
-              <a:t>RIC</a:t>
+              <a:t>CUARTILES</a:t>
             </a:r>
           </a:p>
         </p:txBody>
@@ -25811,7 +25811,7 @@
                 </a:solidFill>
                 <a:latin typeface="Aptos"/>
               </a:rPr>
-              <a:t>Q3 − Q1</a:t>
+              <a:t>Q1 / Q3</a:t>
             </a:r>
           </a:p>
         </p:txBody>
@@ -25846,7 +25846,7 @@
                 </a:solidFill>
                 <a:latin typeface="Aptos"/>
               </a:rPr>
-              <a:t>rango central</a:t>
+              <a:t>percentiles</a:t>
             </a:r>
           </a:p>
         </p:txBody>
@@ -25926,7 +25926,7 @@
                 </a:solidFill>
                 <a:latin typeface="Aptos"/>
               </a:rPr>
-              <a:t>El notebook contiene fi, hi, acumuladas, moda, percentiles, rango, varianza, desviación, CV y RIC.</a:t>
+              <a:t>El notebook aplica fi, hi, acumuladas, moda, percentiles, rango, desviación y CV; el RIC se reserva para la Pregunta 3.</a:t>
             </a:r>
           </a:p>
         </p:txBody>

--- a/presentacion/Del_Acero_al_Algoritmo_FINAL_MORPH.pptx
+++ b/presentacion/Del_Acero_al_Algoritmo_FINAL_MORPH.pptx
@@ -5314,7 +5314,7 @@
                 </a:solidFill>
                 <a:latin typeface="Aptos"/>
               </a:rPr>
-              <a:t>Criterio: valor atípico superior = Q3 + 1,5 × RIC sobre ofertas académicas únicas.</a:t>
+              <a:t>Criterio: percentil 90 sobre ofertas académicas únicas.</a:t>
             </a:r>
           </a:p>
         </p:txBody>
@@ -5966,7 +5966,7 @@
                 </a:solidFill>
                 <a:latin typeface="Aptos"/>
               </a:rPr>
-              <a:t>Q1</a:t>
+              <a:t>P90</a:t>
             </a:r>
           </a:p>
         </p:txBody>
@@ -6001,7 +6001,7 @@
                 </a:solidFill>
                 <a:latin typeface="Aptos"/>
               </a:rPr>
-              <a:t>$1,616M</a:t>
+              <a:t>$4,106M</a:t>
             </a:r>
           </a:p>
         </p:txBody>
@@ -6015,6 +6015,351 @@
         <p:spPr>
           <a:xfrm>
             <a:off x="7360920" y="1828800"/>
+            <a:ext cx="1645920" cy="1143000"/>
+          </a:xfrm>
+          <a:prstGeom prst="roundRect">
+            <a:avLst/>
+          </a:prstGeom>
+          <a:solidFill>
+            <a:srgbClr val="0A1B2E"/>
+          </a:solidFill>
+          <a:ln>
+            <a:solidFill>
+              <a:srgbClr val="FF5B5B"/>
+            </a:solidFill>
+          </a:ln>
+        </p:spPr>
+        <p:style>
+          <a:lnRef idx="1">
+            <a:schemeClr val="accent1"/>
+          </a:lnRef>
+          <a:fillRef idx="3">
+            <a:schemeClr val="accent1"/>
+          </a:fillRef>
+          <a:effectRef idx="2">
+            <a:schemeClr val="accent1"/>
+          </a:effectRef>
+          <a:fontRef idx="minor">
+            <a:schemeClr val="lt1"/>
+          </a:fontRef>
+        </p:style>
+        <p:txBody>
+          <a:bodyPr rtlCol="0" anchor="ctr"/>
+          <a:lstStyle/>
+          <a:p>
+            <a:pPr algn="ctr"/>
+          </a:p>
+        </p:txBody>
+      </p:sp>
+      <p:sp>
+        <p:nvSpPr>
+          <p:cNvPr id="26" name="text"/>
+          <p:cNvSpPr txBox="1"/>
+          <p:nvPr/>
+        </p:nvSpPr>
+        <p:spPr>
+          <a:xfrm>
+            <a:off x="7488936" y="1920240"/>
+            <a:ext cx="1389888" cy="182880"/>
+          </a:xfrm>
+          <a:prstGeom prst="rect">
+            <a:avLst/>
+          </a:prstGeom>
+          <a:noFill/>
+        </p:spPr>
+        <p:txBody>
+          <a:bodyPr wrap="none">
+            <a:spAutoFit/>
+          </a:bodyPr>
+          <a:lstStyle/>
+          <a:p>
+            <a:pPr algn="l"/>
+            <a:r>
+              <a:rPr sz="700" b="1">
+                <a:solidFill>
+                  <a:srgbClr val="FF5B5B"/>
+                </a:solidFill>
+                <a:latin typeface="Aptos"/>
+              </a:rPr>
+              <a:t>OFERTAS</a:t>
+            </a:r>
+          </a:p>
+        </p:txBody>
+      </p:sp>
+      <p:sp>
+        <p:nvSpPr>
+          <p:cNvPr id="27" name="text"/>
+          <p:cNvSpPr txBox="1"/>
+          <p:nvPr/>
+        </p:nvSpPr>
+        <p:spPr>
+          <a:xfrm>
+            <a:off x="7488936" y="2176272"/>
+            <a:ext cx="1389888" cy="438912"/>
+          </a:xfrm>
+          <a:prstGeom prst="rect">
+            <a:avLst/>
+          </a:prstGeom>
+          <a:noFill/>
+        </p:spPr>
+        <p:txBody>
+          <a:bodyPr wrap="none">
+            <a:spAutoFit/>
+          </a:bodyPr>
+          <a:lstStyle/>
+          <a:p>
+            <a:pPr algn="l"/>
+            <a:r>
+              <a:rPr sz="1400" b="1">
+                <a:solidFill>
+                  <a:srgbClr val="F6F9FC"/>
+                </a:solidFill>
+                <a:latin typeface="Aptos"/>
+              </a:rPr>
+              <a:t>128</a:t>
+            </a:r>
+          </a:p>
+        </p:txBody>
+      </p:sp>
+      <p:sp>
+        <p:nvSpPr>
+          <p:cNvPr id="28" name="!!R2"/>
+          <p:cNvSpPr/>
+          <p:nvPr/>
+        </p:nvSpPr>
+        <p:spPr>
+          <a:xfrm>
+            <a:off x="9235440" y="1828800"/>
+            <a:ext cx="1645920" cy="1143000"/>
+          </a:xfrm>
+          <a:prstGeom prst="roundRect">
+            <a:avLst/>
+          </a:prstGeom>
+          <a:solidFill>
+            <a:srgbClr val="0A1B2E"/>
+          </a:solidFill>
+          <a:ln>
+            <a:solidFill>
+              <a:srgbClr val="FFBE50"/>
+            </a:solidFill>
+          </a:ln>
+        </p:spPr>
+        <p:style>
+          <a:lnRef idx="1">
+            <a:schemeClr val="accent1"/>
+          </a:lnRef>
+          <a:fillRef idx="3">
+            <a:schemeClr val="accent1"/>
+          </a:fillRef>
+          <a:effectRef idx="2">
+            <a:schemeClr val="accent1"/>
+          </a:effectRef>
+          <a:fontRef idx="minor">
+            <a:schemeClr val="lt1"/>
+          </a:fontRef>
+        </p:style>
+        <p:txBody>
+          <a:bodyPr rtlCol="0" anchor="ctr"/>
+          <a:lstStyle/>
+          <a:p>
+            <a:pPr algn="ctr"/>
+          </a:p>
+        </p:txBody>
+      </p:sp>
+      <p:sp>
+        <p:nvSpPr>
+          <p:cNvPr id="29" name="text"/>
+          <p:cNvSpPr txBox="1"/>
+          <p:nvPr/>
+        </p:nvSpPr>
+        <p:spPr>
+          <a:xfrm>
+            <a:off x="9363456" y="1920240"/>
+            <a:ext cx="1389888" cy="182880"/>
+          </a:xfrm>
+          <a:prstGeom prst="rect">
+            <a:avLst/>
+          </a:prstGeom>
+          <a:noFill/>
+        </p:spPr>
+        <p:txBody>
+          <a:bodyPr wrap="none">
+            <a:spAutoFit/>
+          </a:bodyPr>
+          <a:lstStyle/>
+          <a:p>
+            <a:pPr algn="l"/>
+            <a:r>
+              <a:rPr sz="700" b="1">
+                <a:solidFill>
+                  <a:srgbClr val="FFBE50"/>
+                </a:solidFill>
+                <a:latin typeface="Aptos"/>
+              </a:rPr>
+              <a:t>PORCENTAJE</a:t>
+            </a:r>
+          </a:p>
+        </p:txBody>
+      </p:sp>
+      <p:sp>
+        <p:nvSpPr>
+          <p:cNvPr id="30" name="text"/>
+          <p:cNvSpPr txBox="1"/>
+          <p:nvPr/>
+        </p:nvSpPr>
+        <p:spPr>
+          <a:xfrm>
+            <a:off x="9363456" y="2176272"/>
+            <a:ext cx="1389888" cy="438912"/>
+          </a:xfrm>
+          <a:prstGeom prst="rect">
+            <a:avLst/>
+          </a:prstGeom>
+          <a:noFill/>
+        </p:spPr>
+        <p:txBody>
+          <a:bodyPr wrap="none">
+            <a:spAutoFit/>
+          </a:bodyPr>
+          <a:lstStyle/>
+          <a:p>
+            <a:pPr algn="l"/>
+            <a:r>
+              <a:rPr sz="1400" b="1">
+                <a:solidFill>
+                  <a:srgbClr val="F6F9FC"/>
+                </a:solidFill>
+                <a:latin typeface="Aptos"/>
+              </a:rPr>
+              <a:t>10,1%</a:t>
+            </a:r>
+          </a:p>
+        </p:txBody>
+      </p:sp>
+      <p:sp>
+        <p:nvSpPr>
+          <p:cNvPr id="31" name="!!R3"/>
+          <p:cNvSpPr/>
+          <p:nvPr/>
+        </p:nvSpPr>
+        <p:spPr>
+          <a:xfrm>
+            <a:off x="5486400" y="3246120"/>
+            <a:ext cx="1645920" cy="1143000"/>
+          </a:xfrm>
+          <a:prstGeom prst="roundRect">
+            <a:avLst/>
+          </a:prstGeom>
+          <a:solidFill>
+            <a:srgbClr val="0A1B2E"/>
+          </a:solidFill>
+          <a:ln>
+            <a:solidFill>
+              <a:srgbClr val="FF8420"/>
+            </a:solidFill>
+          </a:ln>
+        </p:spPr>
+        <p:style>
+          <a:lnRef idx="1">
+            <a:schemeClr val="accent1"/>
+          </a:lnRef>
+          <a:fillRef idx="3">
+            <a:schemeClr val="accent1"/>
+          </a:fillRef>
+          <a:effectRef idx="2">
+            <a:schemeClr val="accent1"/>
+          </a:effectRef>
+          <a:fontRef idx="minor">
+            <a:schemeClr val="lt1"/>
+          </a:fontRef>
+        </p:style>
+        <p:txBody>
+          <a:bodyPr rtlCol="0" anchor="ctr"/>
+          <a:lstStyle/>
+          <a:p>
+            <a:pPr algn="ctr"/>
+          </a:p>
+        </p:txBody>
+      </p:sp>
+      <p:sp>
+        <p:nvSpPr>
+          <p:cNvPr id="32" name="text"/>
+          <p:cNvSpPr txBox="1"/>
+          <p:nvPr/>
+        </p:nvSpPr>
+        <p:spPr>
+          <a:xfrm>
+            <a:off x="5614416" y="3337560"/>
+            <a:ext cx="1389888" cy="182880"/>
+          </a:xfrm>
+          <a:prstGeom prst="rect">
+            <a:avLst/>
+          </a:prstGeom>
+          <a:noFill/>
+        </p:spPr>
+        <p:txBody>
+          <a:bodyPr wrap="none">
+            <a:spAutoFit/>
+          </a:bodyPr>
+          <a:lstStyle/>
+          <a:p>
+            <a:pPr algn="l"/>
+            <a:r>
+              <a:rPr sz="700" b="1">
+                <a:solidFill>
+                  <a:srgbClr val="FF8420"/>
+                </a:solidFill>
+                <a:latin typeface="Aptos"/>
+              </a:rPr>
+              <a:t>CRUCH</a:t>
+            </a:r>
+          </a:p>
+        </p:txBody>
+      </p:sp>
+      <p:sp>
+        <p:nvSpPr>
+          <p:cNvPr id="33" name="text"/>
+          <p:cNvSpPr txBox="1"/>
+          <p:nvPr/>
+        </p:nvSpPr>
+        <p:spPr>
+          <a:xfrm>
+            <a:off x="5614416" y="3593591"/>
+            <a:ext cx="1389888" cy="438912"/>
+          </a:xfrm>
+          <a:prstGeom prst="rect">
+            <a:avLst/>
+          </a:prstGeom>
+          <a:noFill/>
+        </p:spPr>
+        <p:txBody>
+          <a:bodyPr wrap="none">
+            <a:spAutoFit/>
+          </a:bodyPr>
+          <a:lstStyle/>
+          <a:p>
+            <a:pPr algn="l"/>
+            <a:r>
+              <a:rPr sz="1400" b="1">
+                <a:solidFill>
+                  <a:srgbClr val="F6F9FC"/>
+                </a:solidFill>
+                <a:latin typeface="Aptos"/>
+              </a:rPr>
+              <a:t>73</a:t>
+            </a:r>
+          </a:p>
+        </p:txBody>
+      </p:sp>
+      <p:sp>
+        <p:nvSpPr>
+          <p:cNvPr id="34" name="!!R4"/>
+          <p:cNvSpPr/>
+          <p:nvPr/>
+        </p:nvSpPr>
+        <p:spPr>
+          <a:xfrm>
+            <a:off x="7360920" y="3246120"/>
             <a:ext cx="1645920" cy="1143000"/>
           </a:xfrm>
           <a:prstGeom prst="roundRect">
@@ -6053,351 +6398,6 @@
       </p:sp>
       <p:sp>
         <p:nvSpPr>
-          <p:cNvPr id="26" name="text"/>
-          <p:cNvSpPr txBox="1"/>
-          <p:nvPr/>
-        </p:nvSpPr>
-        <p:spPr>
-          <a:xfrm>
-            <a:off x="7488936" y="1920240"/>
-            <a:ext cx="1389888" cy="182880"/>
-          </a:xfrm>
-          <a:prstGeom prst="rect">
-            <a:avLst/>
-          </a:prstGeom>
-          <a:noFill/>
-        </p:spPr>
-        <p:txBody>
-          <a:bodyPr wrap="none">
-            <a:spAutoFit/>
-          </a:bodyPr>
-          <a:lstStyle/>
-          <a:p>
-            <a:pPr algn="l"/>
-            <a:r>
-              <a:rPr sz="700" b="1">
-                <a:solidFill>
-                  <a:srgbClr val="26DAFF"/>
-                </a:solidFill>
-                <a:latin typeface="Aptos"/>
-              </a:rPr>
-              <a:t>Q3</a:t>
-            </a:r>
-          </a:p>
-        </p:txBody>
-      </p:sp>
-      <p:sp>
-        <p:nvSpPr>
-          <p:cNvPr id="27" name="text"/>
-          <p:cNvSpPr txBox="1"/>
-          <p:nvPr/>
-        </p:nvSpPr>
-        <p:spPr>
-          <a:xfrm>
-            <a:off x="7488936" y="2176272"/>
-            <a:ext cx="1389888" cy="438912"/>
-          </a:xfrm>
-          <a:prstGeom prst="rect">
-            <a:avLst/>
-          </a:prstGeom>
-          <a:noFill/>
-        </p:spPr>
-        <p:txBody>
-          <a:bodyPr wrap="none">
-            <a:spAutoFit/>
-          </a:bodyPr>
-          <a:lstStyle/>
-          <a:p>
-            <a:pPr algn="l"/>
-            <a:r>
-              <a:rPr sz="1400" b="1">
-                <a:solidFill>
-                  <a:srgbClr val="F6F9FC"/>
-                </a:solidFill>
-                <a:latin typeface="Aptos"/>
-              </a:rPr>
-              <a:t>$2,580M</a:t>
-            </a:r>
-          </a:p>
-        </p:txBody>
-      </p:sp>
-      <p:sp>
-        <p:nvSpPr>
-          <p:cNvPr id="28" name="!!R2"/>
-          <p:cNvSpPr/>
-          <p:nvPr/>
-        </p:nvSpPr>
-        <p:spPr>
-          <a:xfrm>
-            <a:off x="9235440" y="1828800"/>
-            <a:ext cx="1645920" cy="1143000"/>
-          </a:xfrm>
-          <a:prstGeom prst="roundRect">
-            <a:avLst/>
-          </a:prstGeom>
-          <a:solidFill>
-            <a:srgbClr val="0A1B2E"/>
-          </a:solidFill>
-          <a:ln>
-            <a:solidFill>
-              <a:srgbClr val="FFBE50"/>
-            </a:solidFill>
-          </a:ln>
-        </p:spPr>
-        <p:style>
-          <a:lnRef idx="1">
-            <a:schemeClr val="accent1"/>
-          </a:lnRef>
-          <a:fillRef idx="3">
-            <a:schemeClr val="accent1"/>
-          </a:fillRef>
-          <a:effectRef idx="2">
-            <a:schemeClr val="accent1"/>
-          </a:effectRef>
-          <a:fontRef idx="minor">
-            <a:schemeClr val="lt1"/>
-          </a:fontRef>
-        </p:style>
-        <p:txBody>
-          <a:bodyPr rtlCol="0" anchor="ctr"/>
-          <a:lstStyle/>
-          <a:p>
-            <a:pPr algn="ctr"/>
-          </a:p>
-        </p:txBody>
-      </p:sp>
-      <p:sp>
-        <p:nvSpPr>
-          <p:cNvPr id="29" name="text"/>
-          <p:cNvSpPr txBox="1"/>
-          <p:nvPr/>
-        </p:nvSpPr>
-        <p:spPr>
-          <a:xfrm>
-            <a:off x="9363456" y="1920240"/>
-            <a:ext cx="1389888" cy="182880"/>
-          </a:xfrm>
-          <a:prstGeom prst="rect">
-            <a:avLst/>
-          </a:prstGeom>
-          <a:noFill/>
-        </p:spPr>
-        <p:txBody>
-          <a:bodyPr wrap="none">
-            <a:spAutoFit/>
-          </a:bodyPr>
-          <a:lstStyle/>
-          <a:p>
-            <a:pPr algn="l"/>
-            <a:r>
-              <a:rPr sz="700" b="1">
-                <a:solidFill>
-                  <a:srgbClr val="FFBE50"/>
-                </a:solidFill>
-                <a:latin typeface="Aptos"/>
-              </a:rPr>
-              <a:t>RIC</a:t>
-            </a:r>
-          </a:p>
-        </p:txBody>
-      </p:sp>
-      <p:sp>
-        <p:nvSpPr>
-          <p:cNvPr id="30" name="text"/>
-          <p:cNvSpPr txBox="1"/>
-          <p:nvPr/>
-        </p:nvSpPr>
-        <p:spPr>
-          <a:xfrm>
-            <a:off x="9363456" y="2176272"/>
-            <a:ext cx="1389888" cy="438912"/>
-          </a:xfrm>
-          <a:prstGeom prst="rect">
-            <a:avLst/>
-          </a:prstGeom>
-          <a:noFill/>
-        </p:spPr>
-        <p:txBody>
-          <a:bodyPr wrap="none">
-            <a:spAutoFit/>
-          </a:bodyPr>
-          <a:lstStyle/>
-          <a:p>
-            <a:pPr algn="l"/>
-            <a:r>
-              <a:rPr sz="1400" b="1">
-                <a:solidFill>
-                  <a:srgbClr val="F6F9FC"/>
-                </a:solidFill>
-                <a:latin typeface="Aptos"/>
-              </a:rPr>
-              <a:t>$964k</a:t>
-            </a:r>
-          </a:p>
-        </p:txBody>
-      </p:sp>
-      <p:sp>
-        <p:nvSpPr>
-          <p:cNvPr id="31" name="!!R3"/>
-          <p:cNvSpPr/>
-          <p:nvPr/>
-        </p:nvSpPr>
-        <p:spPr>
-          <a:xfrm>
-            <a:off x="5486400" y="3246120"/>
-            <a:ext cx="1645920" cy="1143000"/>
-          </a:xfrm>
-          <a:prstGeom prst="roundRect">
-            <a:avLst/>
-          </a:prstGeom>
-          <a:solidFill>
-            <a:srgbClr val="0A1B2E"/>
-          </a:solidFill>
-          <a:ln>
-            <a:solidFill>
-              <a:srgbClr val="FF8420"/>
-            </a:solidFill>
-          </a:ln>
-        </p:spPr>
-        <p:style>
-          <a:lnRef idx="1">
-            <a:schemeClr val="accent1"/>
-          </a:lnRef>
-          <a:fillRef idx="3">
-            <a:schemeClr val="accent1"/>
-          </a:fillRef>
-          <a:effectRef idx="2">
-            <a:schemeClr val="accent1"/>
-          </a:effectRef>
-          <a:fontRef idx="minor">
-            <a:schemeClr val="lt1"/>
-          </a:fontRef>
-        </p:style>
-        <p:txBody>
-          <a:bodyPr rtlCol="0" anchor="ctr"/>
-          <a:lstStyle/>
-          <a:p>
-            <a:pPr algn="ctr"/>
-          </a:p>
-        </p:txBody>
-      </p:sp>
-      <p:sp>
-        <p:nvSpPr>
-          <p:cNvPr id="32" name="text"/>
-          <p:cNvSpPr txBox="1"/>
-          <p:nvPr/>
-        </p:nvSpPr>
-        <p:spPr>
-          <a:xfrm>
-            <a:off x="5614416" y="3337560"/>
-            <a:ext cx="1389888" cy="182880"/>
-          </a:xfrm>
-          <a:prstGeom prst="rect">
-            <a:avLst/>
-          </a:prstGeom>
-          <a:noFill/>
-        </p:spPr>
-        <p:txBody>
-          <a:bodyPr wrap="none">
-            <a:spAutoFit/>
-          </a:bodyPr>
-          <a:lstStyle/>
-          <a:p>
-            <a:pPr algn="l"/>
-            <a:r>
-              <a:rPr sz="700" b="1">
-                <a:solidFill>
-                  <a:srgbClr val="FF8420"/>
-                </a:solidFill>
-                <a:latin typeface="Aptos"/>
-              </a:rPr>
-              <a:t>LÍMITE</a:t>
-            </a:r>
-          </a:p>
-        </p:txBody>
-      </p:sp>
-      <p:sp>
-        <p:nvSpPr>
-          <p:cNvPr id="33" name="text"/>
-          <p:cNvSpPr txBox="1"/>
-          <p:nvPr/>
-        </p:nvSpPr>
-        <p:spPr>
-          <a:xfrm>
-            <a:off x="5614416" y="3593591"/>
-            <a:ext cx="1389888" cy="438912"/>
-          </a:xfrm>
-          <a:prstGeom prst="rect">
-            <a:avLst/>
-          </a:prstGeom>
-          <a:noFill/>
-        </p:spPr>
-        <p:txBody>
-          <a:bodyPr wrap="none">
-            <a:spAutoFit/>
-          </a:bodyPr>
-          <a:lstStyle/>
-          <a:p>
-            <a:pPr algn="l"/>
-            <a:r>
-              <a:rPr sz="1400" b="1">
-                <a:solidFill>
-                  <a:srgbClr val="F6F9FC"/>
-                </a:solidFill>
-                <a:latin typeface="Aptos"/>
-              </a:rPr>
-              <a:t>$4,026M</a:t>
-            </a:r>
-          </a:p>
-        </p:txBody>
-      </p:sp>
-      <p:sp>
-        <p:nvSpPr>
-          <p:cNvPr id="34" name="!!R4"/>
-          <p:cNvSpPr/>
-          <p:nvPr/>
-        </p:nvSpPr>
-        <p:spPr>
-          <a:xfrm>
-            <a:off x="7360920" y="3246120"/>
-            <a:ext cx="1645920" cy="1143000"/>
-          </a:xfrm>
-          <a:prstGeom prst="roundRect">
-            <a:avLst/>
-          </a:prstGeom>
-          <a:solidFill>
-            <a:srgbClr val="0A1B2E"/>
-          </a:solidFill>
-          <a:ln>
-            <a:solidFill>
-              <a:srgbClr val="FF5B5B"/>
-            </a:solidFill>
-          </a:ln>
-        </p:spPr>
-        <p:style>
-          <a:lnRef idx="1">
-            <a:schemeClr val="accent1"/>
-          </a:lnRef>
-          <a:fillRef idx="3">
-            <a:schemeClr val="accent1"/>
-          </a:fillRef>
-          <a:effectRef idx="2">
-            <a:schemeClr val="accent1"/>
-          </a:effectRef>
-          <a:fontRef idx="minor">
-            <a:schemeClr val="lt1"/>
-          </a:fontRef>
-        </p:style>
-        <p:txBody>
-          <a:bodyPr rtlCol="0" anchor="ctr"/>
-          <a:lstStyle/>
-          <a:p>
-            <a:pPr algn="ctr"/>
-          </a:p>
-        </p:txBody>
-      </p:sp>
-      <p:sp>
-        <p:nvSpPr>
           <p:cNvPr id="35" name="text"/>
           <p:cNvSpPr txBox="1"/>
           <p:nvPr/>
@@ -6422,11 +6422,11 @@
             <a:r>
               <a:rPr sz="700" b="1">
                 <a:solidFill>
-                  <a:srgbClr val="FF5B5B"/>
-                </a:solidFill>
-                <a:latin typeface="Aptos"/>
-              </a:rPr>
-              <a:t>OFERTAS</a:t>
+                  <a:srgbClr val="26DAFF"/>
+                </a:solidFill>
+                <a:latin typeface="Aptos"/>
+              </a:rPr>
+              <a:t>PRIVADAS</a:t>
             </a:r>
           </a:p>
         </p:txBody>
@@ -6461,7 +6461,7 @@
                 </a:solidFill>
                 <a:latin typeface="Aptos"/>
               </a:rPr>
-              <a:t>135</a:t>
+              <a:t>55</a:t>
             </a:r>
           </a:p>
         </p:txBody>
@@ -6541,7 +6541,7 @@
                 </a:solidFill>
                 <a:latin typeface="Aptos"/>
               </a:rPr>
-              <a:t>135 / 1.273 = 10,6% · 73 CRUCH · 62 privadas · 129 Concepción · 6 Biobío.</a:t>
+              <a:t>128 / 1.273 = 10,1% · 123 Concepción · 5 Biobío · Salud 38 · Tecnología 38.</a:t>
             </a:r>
           </a:p>
         </p:txBody>
@@ -6621,7 +6621,7 @@
                 </a:solidFill>
                 <a:latin typeface="Aptos"/>
               </a:rPr>
-              <a:t>Salud 39</a:t>
+              <a:t>P90</a:t>
             </a:r>
           </a:p>
         </p:txBody>
@@ -6701,7 +6701,7 @@
                 </a:solidFill>
                 <a:latin typeface="Aptos"/>
               </a:rPr>
-              <a:t>Tecnología 39</a:t>
+              <a:t>Percentil</a:t>
             </a:r>
           </a:p>
         </p:txBody>
@@ -25926,7 +25926,7 @@
                 </a:solidFill>
                 <a:latin typeface="Aptos"/>
               </a:rPr>
-              <a:t>El notebook aplica fi, hi, acumuladas, moda, percentiles, rango, desviación y CV; el RIC se reserva para la Pregunta 3.</a:t>
+              <a:t>El notebook aplica fi, hi, acumuladas, moda, percentiles, rango, desviación y CV.</a:t>
             </a:r>
           </a:p>
         </p:txBody>
@@ -33571,7 +33571,7 @@
                 </a:solidFill>
                 <a:latin typeface="Aptos"/>
               </a:rPr>
-              <a:t>Q1 · Q3 · RIC</a:t>
+              <a:t>P25 · P75</a:t>
             </a:r>
           </a:p>
         </p:txBody>

--- a/presentacion/Del_Acero_al_Algoritmo_FINAL_MORPH.pptx
+++ b/presentacion/Del_Acero_al_Algoritmo_FINAL_MORPH.pptx
@@ -29099,7 +29099,7 @@
                 </a:solidFill>
                 <a:latin typeface="Aptos"/>
               </a:rPr>
-              <a:t>INTERPRETACIÓN CONTEXTUAL</a:t>
+              <a:t>LECTURA DE LA ESTRUCTURA FORMATIVA</a:t>
             </a:r>
           </a:p>
         </p:txBody>
@@ -29134,7 +29134,7 @@
                 </a:solidFill>
                 <a:latin typeface="Aptos"/>
               </a:rPr>
-              <a:t>¿Por qué podría existir esa diferencia?</a:t>
+              <a:t>Qué observamos y qué solo podemos plantear como hipótesis</a:t>
             </a:r>
           </a:p>
         </p:txBody>
@@ -29169,7 +29169,7 @@
                 </a:solidFill>
                 <a:latin typeface="Aptos"/>
               </a:rPr>
-              <a:t>Planteamos explicaciones plausibles, no causas demostradas por el Excel.</a:t>
+              <a:t>Primero describimos los datos; explicar sus causas requeriría otras fuentes.</a:t>
             </a:r>
           </a:p>
         </p:txBody>
@@ -29738,8 +29738,8 @@
         </p:blipFill>
         <p:spPr>
           <a:xfrm>
-            <a:off x="7955279" y="1874519"/>
-            <a:ext cx="3246120" cy="2109978"/>
+            <a:off x="8001000" y="1874519"/>
+            <a:ext cx="3154680" cy="2050542"/>
           </a:xfrm>
           <a:prstGeom prst="rect">
             <a:avLst/>
@@ -29755,7 +29755,307 @@
         <p:spPr>
           <a:xfrm>
             <a:off x="731520" y="1828800"/>
-            <a:ext cx="2743200" cy="1188720"/>
+            <a:ext cx="2788920" cy="1188720"/>
+          </a:xfrm>
+          <a:prstGeom prst="roundRect">
+            <a:avLst/>
+          </a:prstGeom>
+          <a:solidFill>
+            <a:srgbClr val="0A1B2E"/>
+          </a:solidFill>
+          <a:ln>
+            <a:solidFill>
+              <a:srgbClr val="26DAFF"/>
+            </a:solidFill>
+          </a:ln>
+        </p:spPr>
+        <p:style>
+          <a:lnRef idx="1">
+            <a:schemeClr val="accent1"/>
+          </a:lnRef>
+          <a:fillRef idx="3">
+            <a:schemeClr val="accent1"/>
+          </a:fillRef>
+          <a:effectRef idx="2">
+            <a:schemeClr val="accent1"/>
+          </a:effectRef>
+          <a:fontRef idx="minor">
+            <a:schemeClr val="lt1"/>
+          </a:fontRef>
+        </p:style>
+        <p:txBody>
+          <a:bodyPr rtlCol="0" anchor="ctr"/>
+          <a:lstStyle/>
+          <a:p>
+            <a:pPr algn="ctr"/>
+          </a:p>
+        </p:txBody>
+      </p:sp>
+      <p:sp>
+        <p:nvSpPr>
+          <p:cNvPr id="23" name="text"/>
+          <p:cNvSpPr txBox="1"/>
+          <p:nvPr/>
+        </p:nvSpPr>
+        <p:spPr>
+          <a:xfrm>
+            <a:off x="859536" y="1920240"/>
+            <a:ext cx="2532887" cy="182880"/>
+          </a:xfrm>
+          <a:prstGeom prst="rect">
+            <a:avLst/>
+          </a:prstGeom>
+          <a:noFill/>
+        </p:spPr>
+        <p:txBody>
+          <a:bodyPr wrap="none">
+            <a:spAutoFit/>
+          </a:bodyPr>
+          <a:lstStyle/>
+          <a:p>
+            <a:pPr algn="l"/>
+            <a:r>
+              <a:rPr sz="700" b="1">
+                <a:solidFill>
+                  <a:srgbClr val="26DAFF"/>
+                </a:solidFill>
+                <a:latin typeface="Aptos"/>
+              </a:rPr>
+              <a:t>TECNOLOGÍA</a:t>
+            </a:r>
+          </a:p>
+        </p:txBody>
+      </p:sp>
+      <p:sp>
+        <p:nvSpPr>
+          <p:cNvPr id="24" name="text"/>
+          <p:cNvSpPr txBox="1"/>
+          <p:nvPr/>
+        </p:nvSpPr>
+        <p:spPr>
+          <a:xfrm>
+            <a:off x="859536" y="2176272"/>
+            <a:ext cx="2532887" cy="438912"/>
+          </a:xfrm>
+          <a:prstGeom prst="rect">
+            <a:avLst/>
+          </a:prstGeom>
+          <a:noFill/>
+        </p:spPr>
+        <p:txBody>
+          <a:bodyPr wrap="none">
+            <a:spAutoFit/>
+          </a:bodyPr>
+          <a:lstStyle/>
+          <a:p>
+            <a:pPr algn="l"/>
+            <a:r>
+              <a:rPr sz="1500" b="1">
+                <a:solidFill>
+                  <a:srgbClr val="F6F9FC"/>
+                </a:solidFill>
+                <a:latin typeface="Aptos"/>
+              </a:rPr>
+              <a:t>27,6%</a:t>
+            </a:r>
+          </a:p>
+        </p:txBody>
+      </p:sp>
+      <p:sp>
+        <p:nvSpPr>
+          <p:cNvPr id="25" name="text"/>
+          <p:cNvSpPr txBox="1"/>
+          <p:nvPr/>
+        </p:nvSpPr>
+        <p:spPr>
+          <a:xfrm>
+            <a:off x="859536" y="2752344"/>
+            <a:ext cx="2532887" cy="164592"/>
+          </a:xfrm>
+          <a:prstGeom prst="rect">
+            <a:avLst/>
+          </a:prstGeom>
+          <a:noFill/>
+        </p:spPr>
+        <p:txBody>
+          <a:bodyPr wrap="none">
+            <a:spAutoFit/>
+          </a:bodyPr>
+          <a:lstStyle/>
+          <a:p>
+            <a:pPr algn="l"/>
+            <a:r>
+              <a:rPr sz="660" b="0">
+                <a:solidFill>
+                  <a:srgbClr val="B4C6D8"/>
+                </a:solidFill>
+                <a:latin typeface="Aptos"/>
+              </a:rPr>
+              <a:t>27.866 matrículas</a:t>
+            </a:r>
+          </a:p>
+        </p:txBody>
+      </p:sp>
+      <p:sp>
+        <p:nvSpPr>
+          <p:cNvPr id="26" name="!!I1"/>
+          <p:cNvSpPr/>
+          <p:nvPr/>
+        </p:nvSpPr>
+        <p:spPr>
+          <a:xfrm>
+            <a:off x="3886200" y="1828800"/>
+            <a:ext cx="2788920" cy="1188720"/>
+          </a:xfrm>
+          <a:prstGeom prst="roundRect">
+            <a:avLst/>
+          </a:prstGeom>
+          <a:solidFill>
+            <a:srgbClr val="0A1B2E"/>
+          </a:solidFill>
+          <a:ln>
+            <a:solidFill>
+              <a:srgbClr val="58D68D"/>
+            </a:solidFill>
+          </a:ln>
+        </p:spPr>
+        <p:style>
+          <a:lnRef idx="1">
+            <a:schemeClr val="accent1"/>
+          </a:lnRef>
+          <a:fillRef idx="3">
+            <a:schemeClr val="accent1"/>
+          </a:fillRef>
+          <a:effectRef idx="2">
+            <a:schemeClr val="accent1"/>
+          </a:effectRef>
+          <a:fontRef idx="minor">
+            <a:schemeClr val="lt1"/>
+          </a:fontRef>
+        </p:style>
+        <p:txBody>
+          <a:bodyPr rtlCol="0" anchor="ctr"/>
+          <a:lstStyle/>
+          <a:p>
+            <a:pPr algn="ctr"/>
+          </a:p>
+        </p:txBody>
+      </p:sp>
+      <p:sp>
+        <p:nvSpPr>
+          <p:cNvPr id="27" name="text"/>
+          <p:cNvSpPr txBox="1"/>
+          <p:nvPr/>
+        </p:nvSpPr>
+        <p:spPr>
+          <a:xfrm>
+            <a:off x="4014215" y="1920240"/>
+            <a:ext cx="2532887" cy="182880"/>
+          </a:xfrm>
+          <a:prstGeom prst="rect">
+            <a:avLst/>
+          </a:prstGeom>
+          <a:noFill/>
+        </p:spPr>
+        <p:txBody>
+          <a:bodyPr wrap="none">
+            <a:spAutoFit/>
+          </a:bodyPr>
+          <a:lstStyle/>
+          <a:p>
+            <a:pPr algn="l"/>
+            <a:r>
+              <a:rPr sz="700" b="1">
+                <a:solidFill>
+                  <a:srgbClr val="58D68D"/>
+                </a:solidFill>
+                <a:latin typeface="Aptos"/>
+              </a:rPr>
+              <a:t>SALUD</a:t>
+            </a:r>
+          </a:p>
+        </p:txBody>
+      </p:sp>
+      <p:sp>
+        <p:nvSpPr>
+          <p:cNvPr id="28" name="text"/>
+          <p:cNvSpPr txBox="1"/>
+          <p:nvPr/>
+        </p:nvSpPr>
+        <p:spPr>
+          <a:xfrm>
+            <a:off x="4014215" y="2176272"/>
+            <a:ext cx="2532887" cy="438912"/>
+          </a:xfrm>
+          <a:prstGeom prst="rect">
+            <a:avLst/>
+          </a:prstGeom>
+          <a:noFill/>
+        </p:spPr>
+        <p:txBody>
+          <a:bodyPr wrap="none">
+            <a:spAutoFit/>
+          </a:bodyPr>
+          <a:lstStyle/>
+          <a:p>
+            <a:pPr algn="l"/>
+            <a:r>
+              <a:rPr sz="1500" b="1">
+                <a:solidFill>
+                  <a:srgbClr val="F6F9FC"/>
+                </a:solidFill>
+                <a:latin typeface="Aptos"/>
+              </a:rPr>
+              <a:t>24,3%</a:t>
+            </a:r>
+          </a:p>
+        </p:txBody>
+      </p:sp>
+      <p:sp>
+        <p:nvSpPr>
+          <p:cNvPr id="29" name="text"/>
+          <p:cNvSpPr txBox="1"/>
+          <p:nvPr/>
+        </p:nvSpPr>
+        <p:spPr>
+          <a:xfrm>
+            <a:off x="4014215" y="2752344"/>
+            <a:ext cx="2532887" cy="164592"/>
+          </a:xfrm>
+          <a:prstGeom prst="rect">
+            <a:avLst/>
+          </a:prstGeom>
+          <a:noFill/>
+        </p:spPr>
+        <p:txBody>
+          <a:bodyPr wrap="none">
+            <a:spAutoFit/>
+          </a:bodyPr>
+          <a:lstStyle/>
+          <a:p>
+            <a:pPr algn="l"/>
+            <a:r>
+              <a:rPr sz="660" b="0">
+                <a:solidFill>
+                  <a:srgbClr val="B4C6D8"/>
+                </a:solidFill>
+                <a:latin typeface="Aptos"/>
+              </a:rPr>
+              <a:t>24.597 matrículas</a:t>
+            </a:r>
+          </a:p>
+        </p:txBody>
+      </p:sp>
+      <p:sp>
+        <p:nvSpPr>
+          <p:cNvPr id="30" name="!!I2"/>
+          <p:cNvSpPr/>
+          <p:nvPr/>
+        </p:nvSpPr>
+        <p:spPr>
+          <a:xfrm>
+            <a:off x="731520" y="3383280"/>
+            <a:ext cx="2788920" cy="1188720"/>
           </a:xfrm>
           <a:prstGeom prst="roundRect">
             <a:avLst/>
@@ -29793,14 +30093,14 @@
       </p:sp>
       <p:sp>
         <p:nvSpPr>
-          <p:cNvPr id="23" name="text"/>
-          <p:cNvSpPr txBox="1"/>
-          <p:nvPr/>
-        </p:nvSpPr>
-        <p:spPr>
-          <a:xfrm>
-            <a:off x="859536" y="1920240"/>
-            <a:ext cx="2487168" cy="182880"/>
+          <p:cNvPr id="31" name="text"/>
+          <p:cNvSpPr txBox="1"/>
+          <p:nvPr/>
+        </p:nvSpPr>
+        <p:spPr>
+          <a:xfrm>
+            <a:off x="859536" y="3474720"/>
+            <a:ext cx="2532887" cy="182880"/>
           </a:xfrm>
           <a:prstGeom prst="rect">
             <a:avLst/>
@@ -29821,21 +30121,21 @@
                 </a:solidFill>
                 <a:latin typeface="Aptos"/>
               </a:rPr>
-              <a:t>HERENCIA INDUSTRIAL</a:t>
-            </a:r>
-          </a:p>
-        </p:txBody>
-      </p:sp>
-      <p:sp>
-        <p:nvSpPr>
-          <p:cNvPr id="24" name="text"/>
-          <p:cNvSpPr txBox="1"/>
-          <p:nvPr/>
-        </p:nvSpPr>
-        <p:spPr>
-          <a:xfrm>
-            <a:off x="859536" y="2176272"/>
-            <a:ext cx="2487168" cy="438912"/>
+              <a:t>HUMANIDADES</a:t>
+            </a:r>
+          </a:p>
+        </p:txBody>
+      </p:sp>
+      <p:sp>
+        <p:nvSpPr>
+          <p:cNvPr id="32" name="text"/>
+          <p:cNvSpPr txBox="1"/>
+          <p:nvPr/>
+        </p:nvSpPr>
+        <p:spPr>
+          <a:xfrm>
+            <a:off x="859536" y="3730752"/>
+            <a:ext cx="2532887" cy="438912"/>
           </a:xfrm>
           <a:prstGeom prst="rect">
             <a:avLst/>
@@ -29850,27 +30150,27 @@
           <a:p>
             <a:pPr algn="l"/>
             <a:r>
-              <a:rPr sz="1400" b="1">
+              <a:rPr sz="1500" b="1">
                 <a:solidFill>
                   <a:srgbClr val="F6F9FC"/>
                 </a:solidFill>
                 <a:latin typeface="Aptos"/>
               </a:rPr>
-              <a:t>Trayectoria</a:t>
-            </a:r>
-          </a:p>
-        </p:txBody>
-      </p:sp>
-      <p:sp>
-        <p:nvSpPr>
-          <p:cNvPr id="25" name="text"/>
-          <p:cNvSpPr txBox="1"/>
-          <p:nvPr/>
-        </p:nvSpPr>
-        <p:spPr>
-          <a:xfrm>
-            <a:off x="859536" y="2752344"/>
-            <a:ext cx="2487168" cy="164592"/>
+              <a:t>0,5%</a:t>
+            </a:r>
+          </a:p>
+        </p:txBody>
+      </p:sp>
+      <p:sp>
+        <p:nvSpPr>
+          <p:cNvPr id="33" name="text"/>
+          <p:cNvSpPr txBox="1"/>
+          <p:nvPr/>
+        </p:nvSpPr>
+        <p:spPr>
+          <a:xfrm>
+            <a:off x="859536" y="4306824"/>
+            <a:ext cx="2532887" cy="164592"/>
           </a:xfrm>
           <a:prstGeom prst="rect">
             <a:avLst/>
@@ -29891,21 +30191,21 @@
                 </a:solidFill>
                 <a:latin typeface="Aptos"/>
               </a:rPr>
-              <a:t>interpretación contextual</a:t>
-            </a:r>
-          </a:p>
-        </p:txBody>
-      </p:sp>
-      <p:sp>
-        <p:nvSpPr>
-          <p:cNvPr id="26" name="!!I1"/>
+              <a:t>510 matrículas</a:t>
+            </a:r>
+          </a:p>
+        </p:txBody>
+      </p:sp>
+      <p:sp>
+        <p:nvSpPr>
+          <p:cNvPr id="34" name="!!I3"/>
           <p:cNvSpPr/>
           <p:nvPr/>
         </p:nvSpPr>
         <p:spPr>
           <a:xfrm>
-            <a:off x="3840480" y="1828800"/>
-            <a:ext cx="2743200" cy="1188720"/>
+            <a:off x="3886200" y="3383280"/>
+            <a:ext cx="2788920" cy="1188720"/>
           </a:xfrm>
           <a:prstGeom prst="roundRect">
             <a:avLst/>
@@ -29915,7 +30215,7 @@
           </a:solidFill>
           <a:ln>
             <a:solidFill>
-              <a:srgbClr val="FF8420"/>
+              <a:srgbClr val="FF5B5B"/>
             </a:solidFill>
           </a:ln>
         </p:spPr>
@@ -29943,14 +30243,14 @@
       </p:sp>
       <p:sp>
         <p:nvSpPr>
-          <p:cNvPr id="27" name="text"/>
-          <p:cNvSpPr txBox="1"/>
-          <p:nvPr/>
-        </p:nvSpPr>
-        <p:spPr>
-          <a:xfrm>
-            <a:off x="3968496" y="1920240"/>
-            <a:ext cx="2487168" cy="182880"/>
+          <p:cNvPr id="35" name="text"/>
+          <p:cNvSpPr txBox="1"/>
+          <p:nvPr/>
+        </p:nvSpPr>
+        <p:spPr>
+          <a:xfrm>
+            <a:off x="4014215" y="3474720"/>
+            <a:ext cx="2532887" cy="182880"/>
           </a:xfrm>
           <a:prstGeom prst="rect">
             <a:avLst/>
@@ -29967,25 +30267,25 @@
             <a:r>
               <a:rPr sz="700" b="1">
                 <a:solidFill>
-                  <a:srgbClr val="FF8420"/>
-                </a:solidFill>
-                <a:latin typeface="Aptos"/>
-              </a:rPr>
-              <a:t>OFERTA FORMATIVA</a:t>
-            </a:r>
-          </a:p>
-        </p:txBody>
-      </p:sp>
-      <p:sp>
-        <p:nvSpPr>
-          <p:cNvPr id="28" name="text"/>
-          <p:cNvSpPr txBox="1"/>
-          <p:nvPr/>
-        </p:nvSpPr>
-        <p:spPr>
-          <a:xfrm>
-            <a:off x="3968496" y="2176272"/>
-            <a:ext cx="2487168" cy="438912"/>
+                  <a:srgbClr val="FF5B5B"/>
+                </a:solidFill>
+                <a:latin typeface="Aptos"/>
+              </a:rPr>
+              <a:t>CAUSAS</a:t>
+            </a:r>
+          </a:p>
+        </p:txBody>
+      </p:sp>
+      <p:sp>
+        <p:nvSpPr>
+          <p:cNvPr id="36" name="text"/>
+          <p:cNvSpPr txBox="1"/>
+          <p:nvPr/>
+        </p:nvSpPr>
+        <p:spPr>
+          <a:xfrm>
+            <a:off x="4014215" y="3730752"/>
+            <a:ext cx="2532887" cy="438912"/>
           </a:xfrm>
           <a:prstGeom prst="rect">
             <a:avLst/>
@@ -30000,27 +30300,27 @@
           <a:p>
             <a:pPr algn="l"/>
             <a:r>
-              <a:rPr sz="1400" b="1">
+              <a:rPr sz="1500" b="1">
                 <a:solidFill>
                   <a:srgbClr val="F6F9FC"/>
                 </a:solidFill>
                 <a:latin typeface="Aptos"/>
               </a:rPr>
-              <a:t>Visible</a:t>
-            </a:r>
-          </a:p>
-        </p:txBody>
-      </p:sp>
-      <p:sp>
-        <p:nvSpPr>
-          <p:cNvPr id="29" name="text"/>
-          <p:cNvSpPr txBox="1"/>
-          <p:nvPr/>
-        </p:nvSpPr>
-        <p:spPr>
-          <a:xfrm>
-            <a:off x="3968496" y="2752344"/>
-            <a:ext cx="2487168" cy="164592"/>
+              <a:t>No identificadas</a:t>
+            </a:r>
+          </a:p>
+        </p:txBody>
+      </p:sp>
+      <p:sp>
+        <p:nvSpPr>
+          <p:cNvPr id="37" name="text"/>
+          <p:cNvSpPr txBox="1"/>
+          <p:nvPr/>
+        </p:nvSpPr>
+        <p:spPr>
+          <a:xfrm>
+            <a:off x="4014215" y="4306824"/>
+            <a:ext cx="2532887" cy="164592"/>
           </a:xfrm>
           <a:prstGeom prst="rect">
             <a:avLst/>
@@ -30041,27 +30341,27 @@
                 </a:solidFill>
                 <a:latin typeface="Aptos"/>
               </a:rPr>
-              <a:t>interpretación contextual</a:t>
-            </a:r>
-          </a:p>
-        </p:txBody>
-      </p:sp>
-      <p:sp>
-        <p:nvSpPr>
-          <p:cNvPr id="30" name="!!I2"/>
+              <a:t>por esta base</a:t>
+            </a:r>
+          </a:p>
+        </p:txBody>
+      </p:sp>
+      <p:sp>
+        <p:nvSpPr>
+          <p:cNvPr id="38" name="!!NOTE"/>
           <p:cNvSpPr/>
           <p:nvPr/>
         </p:nvSpPr>
         <p:spPr>
           <a:xfrm>
-            <a:off x="731520" y="3383280"/>
-            <a:ext cx="2743200" cy="1188720"/>
+            <a:off x="731520" y="4937760"/>
+            <a:ext cx="5989320" cy="502920"/>
           </a:xfrm>
           <a:prstGeom prst="roundRect">
             <a:avLst/>
           </a:prstGeom>
           <a:solidFill>
-            <a:srgbClr val="0A1B2E"/>
+            <a:srgbClr val="26DAFF"/>
           </a:solidFill>
           <a:ln>
             <a:solidFill>
@@ -30093,335 +30393,35 @@
       </p:sp>
       <p:sp>
         <p:nvSpPr>
-          <p:cNvPr id="31" name="text"/>
-          <p:cNvSpPr txBox="1"/>
-          <p:nvPr/>
-        </p:nvSpPr>
-        <p:spPr>
-          <a:xfrm>
-            <a:off x="859536" y="3474720"/>
-            <a:ext cx="2487168" cy="182880"/>
-          </a:xfrm>
-          <a:prstGeom prst="rect">
-            <a:avLst/>
-          </a:prstGeom>
-          <a:noFill/>
-        </p:spPr>
-        <p:txBody>
-          <a:bodyPr wrap="none">
-            <a:spAutoFit/>
-          </a:bodyPr>
-          <a:lstStyle/>
-          <a:p>
-            <a:pPr algn="l"/>
-            <a:r>
-              <a:rPr sz="700" b="1">
-                <a:solidFill>
-                  <a:srgbClr val="26DAFF"/>
-                </a:solidFill>
-                <a:latin typeface="Aptos"/>
-              </a:rPr>
-              <a:t>TRANSFORMACIÓN</a:t>
-            </a:r>
-          </a:p>
-        </p:txBody>
-      </p:sp>
-      <p:sp>
-        <p:nvSpPr>
-          <p:cNvPr id="32" name="text"/>
-          <p:cNvSpPr txBox="1"/>
-          <p:nvPr/>
-        </p:nvSpPr>
-        <p:spPr>
-          <a:xfrm>
-            <a:off x="859536" y="3730752"/>
-            <a:ext cx="2487168" cy="438912"/>
-          </a:xfrm>
-          <a:prstGeom prst="rect">
-            <a:avLst/>
-          </a:prstGeom>
-          <a:noFill/>
-        </p:spPr>
-        <p:txBody>
-          <a:bodyPr wrap="none">
-            <a:spAutoFit/>
-          </a:bodyPr>
-          <a:lstStyle/>
-          <a:p>
-            <a:pPr algn="l"/>
-            <a:r>
-              <a:rPr sz="1400" b="1">
+          <p:cNvPr id="39" name="text"/>
+          <p:cNvSpPr txBox="1"/>
+          <p:nvPr/>
+        </p:nvSpPr>
+        <p:spPr>
+          <a:xfrm>
+            <a:off x="822960" y="5047488"/>
+            <a:ext cx="5806440" cy="274320"/>
+          </a:xfrm>
+          <a:prstGeom prst="rect">
+            <a:avLst/>
+          </a:prstGeom>
+          <a:noFill/>
+        </p:spPr>
+        <p:txBody>
+          <a:bodyPr wrap="none">
+            <a:spAutoFit/>
+          </a:bodyPr>
+          <a:lstStyle/>
+          <a:p>
+            <a:pPr algn="ctr"/>
+            <a:r>
+              <a:rPr sz="850" b="1">
                 <a:solidFill>
                   <a:srgbClr val="F6F9FC"/>
                 </a:solidFill>
                 <a:latin typeface="Aptos"/>
               </a:rPr>
-              <a:t>Más reciente</a:t>
-            </a:r>
-          </a:p>
-        </p:txBody>
-      </p:sp>
-      <p:sp>
-        <p:nvSpPr>
-          <p:cNvPr id="33" name="text"/>
-          <p:cNvSpPr txBox="1"/>
-          <p:nvPr/>
-        </p:nvSpPr>
-        <p:spPr>
-          <a:xfrm>
-            <a:off x="859536" y="4306824"/>
-            <a:ext cx="2487168" cy="164592"/>
-          </a:xfrm>
-          <a:prstGeom prst="rect">
-            <a:avLst/>
-          </a:prstGeom>
-          <a:noFill/>
-        </p:spPr>
-        <p:txBody>
-          <a:bodyPr wrap="none">
-            <a:spAutoFit/>
-          </a:bodyPr>
-          <a:lstStyle/>
-          <a:p>
-            <a:pPr algn="l"/>
-            <a:r>
-              <a:rPr sz="660" b="0">
-                <a:solidFill>
-                  <a:srgbClr val="B4C6D8"/>
-                </a:solidFill>
-                <a:latin typeface="Aptos"/>
-              </a:rPr>
-              <a:t>interpretación contextual</a:t>
-            </a:r>
-          </a:p>
-        </p:txBody>
-      </p:sp>
-      <p:sp>
-        <p:nvSpPr>
-          <p:cNvPr id="34" name="!!I3"/>
-          <p:cNvSpPr/>
-          <p:nvPr/>
-        </p:nvSpPr>
-        <p:spPr>
-          <a:xfrm>
-            <a:off x="3840480" y="3383280"/>
-            <a:ext cx="2743200" cy="1188720"/>
-          </a:xfrm>
-          <a:prstGeom prst="roundRect">
-            <a:avLst/>
-          </a:prstGeom>
-          <a:solidFill>
-            <a:srgbClr val="0A1B2E"/>
-          </a:solidFill>
-          <a:ln>
-            <a:solidFill>
-              <a:srgbClr val="26DAFF"/>
-            </a:solidFill>
-          </a:ln>
-        </p:spPr>
-        <p:style>
-          <a:lnRef idx="1">
-            <a:schemeClr val="accent1"/>
-          </a:lnRef>
-          <a:fillRef idx="3">
-            <a:schemeClr val="accent1"/>
-          </a:fillRef>
-          <a:effectRef idx="2">
-            <a:schemeClr val="accent1"/>
-          </a:effectRef>
-          <a:fontRef idx="minor">
-            <a:schemeClr val="lt1"/>
-          </a:fontRef>
-        </p:style>
-        <p:txBody>
-          <a:bodyPr rtlCol="0" anchor="ctr"/>
-          <a:lstStyle/>
-          <a:p>
-            <a:pPr algn="ctr"/>
-          </a:p>
-        </p:txBody>
-      </p:sp>
-      <p:sp>
-        <p:nvSpPr>
-          <p:cNvPr id="35" name="text"/>
-          <p:cNvSpPr txBox="1"/>
-          <p:nvPr/>
-        </p:nvSpPr>
-        <p:spPr>
-          <a:xfrm>
-            <a:off x="3968496" y="3474720"/>
-            <a:ext cx="2487168" cy="182880"/>
-          </a:xfrm>
-          <a:prstGeom prst="rect">
-            <a:avLst/>
-          </a:prstGeom>
-          <a:noFill/>
-        </p:spPr>
-        <p:txBody>
-          <a:bodyPr wrap="none">
-            <a:spAutoFit/>
-          </a:bodyPr>
-          <a:lstStyle/>
-          <a:p>
-            <a:pPr algn="l"/>
-            <a:r>
-              <a:rPr sz="700" b="1">
-                <a:solidFill>
-                  <a:srgbClr val="26DAFF"/>
-                </a:solidFill>
-                <a:latin typeface="Aptos"/>
-              </a:rPr>
-              <a:t>CAUSALIDAD</a:t>
-            </a:r>
-          </a:p>
-        </p:txBody>
-      </p:sp>
-      <p:sp>
-        <p:nvSpPr>
-          <p:cNvPr id="36" name="text"/>
-          <p:cNvSpPr txBox="1"/>
-          <p:nvPr/>
-        </p:nvSpPr>
-        <p:spPr>
-          <a:xfrm>
-            <a:off x="3968496" y="3730752"/>
-            <a:ext cx="2487168" cy="438912"/>
-          </a:xfrm>
-          <a:prstGeom prst="rect">
-            <a:avLst/>
-          </a:prstGeom>
-          <a:noFill/>
-        </p:spPr>
-        <p:txBody>
-          <a:bodyPr wrap="none">
-            <a:spAutoFit/>
-          </a:bodyPr>
-          <a:lstStyle/>
-          <a:p>
-            <a:pPr algn="l"/>
-            <a:r>
-              <a:rPr sz="1400" b="1">
-                <a:solidFill>
-                  <a:srgbClr val="F6F9FC"/>
-                </a:solidFill>
-                <a:latin typeface="Aptos"/>
-              </a:rPr>
-              <a:t>No demostrada</a:t>
-            </a:r>
-          </a:p>
-        </p:txBody>
-      </p:sp>
-      <p:sp>
-        <p:nvSpPr>
-          <p:cNvPr id="37" name="text"/>
-          <p:cNvSpPr txBox="1"/>
-          <p:nvPr/>
-        </p:nvSpPr>
-        <p:spPr>
-          <a:xfrm>
-            <a:off x="3968496" y="4306824"/>
-            <a:ext cx="2487168" cy="164592"/>
-          </a:xfrm>
-          <a:prstGeom prst="rect">
-            <a:avLst/>
-          </a:prstGeom>
-          <a:noFill/>
-        </p:spPr>
-        <p:txBody>
-          <a:bodyPr wrap="none">
-            <a:spAutoFit/>
-          </a:bodyPr>
-          <a:lstStyle/>
-          <a:p>
-            <a:pPr algn="l"/>
-            <a:r>
-              <a:rPr sz="660" b="0">
-                <a:solidFill>
-                  <a:srgbClr val="B4C6D8"/>
-                </a:solidFill>
-                <a:latin typeface="Aptos"/>
-              </a:rPr>
-              <a:t>interpretación contextual</a:t>
-            </a:r>
-          </a:p>
-        </p:txBody>
-      </p:sp>
-      <p:sp>
-        <p:nvSpPr>
-          <p:cNvPr id="38" name="!!NOTE"/>
-          <p:cNvSpPr/>
-          <p:nvPr/>
-        </p:nvSpPr>
-        <p:spPr>
-          <a:xfrm>
-            <a:off x="731520" y="4937760"/>
-            <a:ext cx="5852160" cy="502920"/>
-          </a:xfrm>
-          <a:prstGeom prst="roundRect">
-            <a:avLst/>
-          </a:prstGeom>
-          <a:solidFill>
-            <a:srgbClr val="FF5B5B"/>
-          </a:solidFill>
-          <a:ln>
-            <a:solidFill>
-              <a:srgbClr val="FF5B5B"/>
-            </a:solidFill>
-          </a:ln>
-        </p:spPr>
-        <p:style>
-          <a:lnRef idx="1">
-            <a:schemeClr val="accent1"/>
-          </a:lnRef>
-          <a:fillRef idx="3">
-            <a:schemeClr val="accent1"/>
-          </a:fillRef>
-          <a:effectRef idx="2">
-            <a:schemeClr val="accent1"/>
-          </a:effectRef>
-          <a:fontRef idx="minor">
-            <a:schemeClr val="lt1"/>
-          </a:fontRef>
-        </p:style>
-        <p:txBody>
-          <a:bodyPr rtlCol="0" anchor="ctr"/>
-          <a:lstStyle/>
-          <a:p>
-            <a:pPr algn="ctr"/>
-          </a:p>
-        </p:txBody>
-      </p:sp>
-      <p:sp>
-        <p:nvSpPr>
-          <p:cNvPr id="39" name="text"/>
-          <p:cNvSpPr txBox="1"/>
-          <p:nvPr/>
-        </p:nvSpPr>
-        <p:spPr>
-          <a:xfrm>
-            <a:off x="822960" y="5047488"/>
-            <a:ext cx="5669280" cy="274320"/>
-          </a:xfrm>
-          <a:prstGeom prst="rect">
-            <a:avLst/>
-          </a:prstGeom>
-          <a:noFill/>
-        </p:spPr>
-        <p:txBody>
-          <a:bodyPr wrap="none">
-            <a:spAutoFit/>
-          </a:bodyPr>
-          <a:lstStyle/>
-          <a:p>
-            <a:pPr algn="ctr"/>
-            <a:r>
-              <a:rPr sz="850" b="1">
-                <a:solidFill>
-                  <a:srgbClr val="F6F9FC"/>
-                </a:solidFill>
-                <a:latin typeface="Aptos"/>
-              </a:rPr>
-              <a:t>Contexto regional ≠ prueba causal.</a:t>
+              <a:t>El patrón es compatible con un fuerte peso técnico/productivo y de salud, pero no demuestra por qué ocurre.</a:t>
             </a:r>
           </a:p>
         </p:txBody>
@@ -32056,7 +32056,7 @@
                 </a:solidFill>
                 <a:latin typeface="Aptos"/>
               </a:rPr>
-              <a:t>Unidad: 1.273 ofertas únicas. Criterio: mediana, menos sensible a valores extremos.</a:t>
+              <a:t>Unidad: 1.273 ofertas únicas. Usamos mediana; la base compara precios, no identifica sus causas.</a:t>
             </a:r>
           </a:p>
         </p:txBody>

--- a/presentacion/Del_Acero_al_Algoritmo_FINAL_MORPH.pptx
+++ b/presentacion/Del_Acero_al_Algoritmo_FINAL_MORPH.pptx
@@ -8231,7 +8231,7 @@
                 </a:solidFill>
                 <a:latin typeface="Aptos"/>
               </a:rPr>
-              <a:t>Arauco tiene mayor proporción; Concepción concentra por lejos el mayor volumen.</a:t>
+              <a:t>Concepción concentra el mayor volumen; Arauco la mayor proporción. La base no registra residencia de origen ni migración estudiantil.</a:t>
             </a:r>
           </a:p>
         </p:txBody>
@@ -9459,7 +9459,7 @@
                 </a:solidFill>
                 <a:latin typeface="Aptos"/>
               </a:rPr>
-              <a:t>¿La transformación reducirá brechas o trasladará desigualdades hacia nuevas ocupaciones?</a:t>
+              <a:t>La brecha es descriptiva: la base no demuestra que la matriz productiva cause esta distribución.</a:t>
             </a:r>
           </a:p>
         </p:txBody>
